--- a/cover/cover-11x18cm.pptx
+++ b/cover/cover-11x18cm.pptx
@@ -243,7 +243,7 @@
           <a:p>
             <a:fld id="{BC0168DA-BD25-412D-B32A-EDD36FEC6119}" type="datetimeFigureOut">
               <a:rPr lang="en-US" smtClean="0"/>
-              <a:t>3/25/2026</a:t>
+              <a:t>4/3/2026</a:t>
             </a:fld>
             <a:endParaRPr lang="en-US"/>
           </a:p>
@@ -413,7 +413,7 @@
           <a:p>
             <a:fld id="{BC0168DA-BD25-412D-B32A-EDD36FEC6119}" type="datetimeFigureOut">
               <a:rPr lang="en-US" smtClean="0"/>
-              <a:t>3/25/2026</a:t>
+              <a:t>4/3/2026</a:t>
             </a:fld>
             <a:endParaRPr lang="en-US"/>
           </a:p>
@@ -593,7 +593,7 @@
           <a:p>
             <a:fld id="{BC0168DA-BD25-412D-B32A-EDD36FEC6119}" type="datetimeFigureOut">
               <a:rPr lang="en-US" smtClean="0"/>
-              <a:t>3/25/2026</a:t>
+              <a:t>4/3/2026</a:t>
             </a:fld>
             <a:endParaRPr lang="en-US"/>
           </a:p>
@@ -763,7 +763,7 @@
           <a:p>
             <a:fld id="{BC0168DA-BD25-412D-B32A-EDD36FEC6119}" type="datetimeFigureOut">
               <a:rPr lang="en-US" smtClean="0"/>
-              <a:t>3/25/2026</a:t>
+              <a:t>4/3/2026</a:t>
             </a:fld>
             <a:endParaRPr lang="en-US"/>
           </a:p>
@@ -1009,7 +1009,7 @@
           <a:p>
             <a:fld id="{BC0168DA-BD25-412D-B32A-EDD36FEC6119}" type="datetimeFigureOut">
               <a:rPr lang="en-US" smtClean="0"/>
-              <a:t>3/25/2026</a:t>
+              <a:t>4/3/2026</a:t>
             </a:fld>
             <a:endParaRPr lang="en-US"/>
           </a:p>
@@ -1241,7 +1241,7 @@
           <a:p>
             <a:fld id="{BC0168DA-BD25-412D-B32A-EDD36FEC6119}" type="datetimeFigureOut">
               <a:rPr lang="en-US" smtClean="0"/>
-              <a:t>3/25/2026</a:t>
+              <a:t>4/3/2026</a:t>
             </a:fld>
             <a:endParaRPr lang="en-US"/>
           </a:p>
@@ -1608,7 +1608,7 @@
           <a:p>
             <a:fld id="{BC0168DA-BD25-412D-B32A-EDD36FEC6119}" type="datetimeFigureOut">
               <a:rPr lang="en-US" smtClean="0"/>
-              <a:t>3/25/2026</a:t>
+              <a:t>4/3/2026</a:t>
             </a:fld>
             <a:endParaRPr lang="en-US"/>
           </a:p>
@@ -1726,7 +1726,7 @@
           <a:p>
             <a:fld id="{BC0168DA-BD25-412D-B32A-EDD36FEC6119}" type="datetimeFigureOut">
               <a:rPr lang="en-US" smtClean="0"/>
-              <a:t>3/25/2026</a:t>
+              <a:t>4/3/2026</a:t>
             </a:fld>
             <a:endParaRPr lang="en-US"/>
           </a:p>
@@ -1821,7 +1821,7 @@
           <a:p>
             <a:fld id="{BC0168DA-BD25-412D-B32A-EDD36FEC6119}" type="datetimeFigureOut">
               <a:rPr lang="en-US" smtClean="0"/>
-              <a:t>3/25/2026</a:t>
+              <a:t>4/3/2026</a:t>
             </a:fld>
             <a:endParaRPr lang="en-US"/>
           </a:p>
@@ -2098,7 +2098,7 @@
           <a:p>
             <a:fld id="{BC0168DA-BD25-412D-B32A-EDD36FEC6119}" type="datetimeFigureOut">
               <a:rPr lang="en-US" smtClean="0"/>
-              <a:t>3/25/2026</a:t>
+              <a:t>4/3/2026</a:t>
             </a:fld>
             <a:endParaRPr lang="en-US"/>
           </a:p>
@@ -2355,7 +2355,7 @@
           <a:p>
             <a:fld id="{BC0168DA-BD25-412D-B32A-EDD36FEC6119}" type="datetimeFigureOut">
               <a:rPr lang="en-US" smtClean="0"/>
-              <a:t>3/25/2026</a:t>
+              <a:t>4/3/2026</a:t>
             </a:fld>
             <a:endParaRPr lang="en-US"/>
           </a:p>
@@ -2568,7 +2568,7 @@
           <a:p>
             <a:fld id="{BC0168DA-BD25-412D-B32A-EDD36FEC6119}" type="datetimeFigureOut">
               <a:rPr lang="en-US" smtClean="0"/>
-              <a:t>3/25/2026</a:t>
+              <a:t>4/3/2026</a:t>
             </a:fld>
             <a:endParaRPr lang="en-US"/>
           </a:p>
@@ -2989,8 +2989,8 @@
         </p:nvSpPr>
         <p:spPr bwMode="auto">
           <a:xfrm>
-            <a:off x="237647" y="380153"/>
-            <a:ext cx="3483928" cy="1015663"/>
+            <a:off x="351947" y="626374"/>
+            <a:ext cx="3483928" cy="523220"/>
           </a:xfrm>
           <a:prstGeom prst="rect">
             <a:avLst/>
@@ -3063,55 +3063,6 @@
               <a:cs typeface="Arial" panose="020B0604020202020204" pitchFamily="34" charset="0"/>
             </a:endParaRPr>
           </a:p>
-          <a:p>
-            <a:pPr defTabSz="914400" eaLnBrk="0" fontAlgn="base" hangingPunct="0">
-              <a:spcBef>
-                <a:spcPct val="0"/>
-              </a:spcBef>
-              <a:spcAft>
-                <a:spcPct val="0"/>
-              </a:spcAft>
-            </a:pPr>
-            <a:endParaRPr lang="en-US" altLang="en-US" sz="600" dirty="0">
-              <a:latin typeface="Calibri" panose="020F0502020204030204" pitchFamily="34" charset="0"/>
-              <a:ea typeface="Yu Mincho" panose="02020400000000000000" pitchFamily="18" charset="-128"/>
-              <a:cs typeface="Arial" panose="020B0604020202020204" pitchFamily="34" charset="0"/>
-            </a:endParaRPr>
-          </a:p>
-          <a:p>
-            <a:pPr defTabSz="914400" eaLnBrk="0" fontAlgn="base" hangingPunct="0">
-              <a:spcBef>
-                <a:spcPct val="0"/>
-              </a:spcBef>
-              <a:spcAft>
-                <a:spcPct val="0"/>
-              </a:spcAft>
-            </a:pPr>
-            <a:endParaRPr lang="en-US" altLang="en-US" sz="900" dirty="0">
-              <a:latin typeface="Calibri" panose="020F0502020204030204" pitchFamily="34" charset="0"/>
-              <a:ea typeface="Yu Mincho" panose="02020400000000000000" pitchFamily="18" charset="-128"/>
-              <a:cs typeface="Arial" panose="020B0604020202020204" pitchFamily="34" charset="0"/>
-            </a:endParaRPr>
-          </a:p>
-          <a:p>
-            <a:pPr defTabSz="914400" eaLnBrk="0" fontAlgn="base" hangingPunct="0">
-              <a:spcBef>
-                <a:spcPct val="0"/>
-              </a:spcBef>
-              <a:spcAft>
-                <a:spcPct val="0"/>
-              </a:spcAft>
-            </a:pPr>
-            <a:r>
-              <a:rPr lang="en-US" altLang="en-US" sz="1050" dirty="0">
-                <a:latin typeface="Calibri" panose="020F0502020204030204" pitchFamily="34" charset="0"/>
-                <a:ea typeface="Yu Mincho" panose="02020400000000000000" pitchFamily="18" charset="-128"/>
-                <a:cs typeface="Arial" panose="020B0604020202020204" pitchFamily="34" charset="0"/>
-              </a:rPr>
-              <a:t>Yann Debray</a:t>
-            </a:r>
-            <a:endParaRPr lang="en-US" altLang="en-US" sz="700" dirty="0"/>
-          </a:p>
         </p:txBody>
       </p:sp>
       <p:pic>
@@ -3142,7 +3093,7 @@
         </p:blipFill>
         <p:spPr>
           <a:xfrm>
-            <a:off x="412042" y="2779774"/>
+            <a:off x="526342" y="2787394"/>
             <a:ext cx="3135137" cy="3135137"/>
           </a:xfrm>
           <a:prstGeom prst="rect">
@@ -3150,6 +3101,85 @@
           </a:prstGeom>
         </p:spPr>
       </p:pic>
+      <p:sp>
+        <p:nvSpPr>
+          <p:cNvPr id="7" name="TextBox 6">
+            <a:extLst>
+              <a:ext uri="{FF2B5EF4-FFF2-40B4-BE49-F238E27FC236}">
+                <a16:creationId xmlns:a16="http://schemas.microsoft.com/office/drawing/2014/main" id="{278EDA5F-0691-6A7E-3DC3-21036B33B9BE}"/>
+              </a:ext>
+            </a:extLst>
+          </p:cNvPr>
+          <p:cNvSpPr txBox="1"/>
+          <p:nvPr/>
+        </p:nvSpPr>
+        <p:spPr>
+          <a:xfrm>
+            <a:off x="2385060" y="6014762"/>
+            <a:ext cx="1450815" cy="253916"/>
+          </a:xfrm>
+          <a:prstGeom prst="rect">
+            <a:avLst/>
+          </a:prstGeom>
+          <a:noFill/>
+        </p:spPr>
+        <p:txBody>
+          <a:bodyPr wrap="square">
+            <a:spAutoFit/>
+          </a:bodyPr>
+          <a:lstStyle/>
+          <a:p>
+            <a:pPr marL="0" marR="0" lvl="0" indent="0" algn="r" defTabSz="914400" rtl="0" eaLnBrk="0" fontAlgn="base" latinLnBrk="0" hangingPunct="0">
+              <a:lnSpc>
+                <a:spcPct val="100000"/>
+              </a:lnSpc>
+              <a:spcBef>
+                <a:spcPct val="0"/>
+              </a:spcBef>
+              <a:spcAft>
+                <a:spcPct val="0"/>
+              </a:spcAft>
+              <a:buClrTx/>
+              <a:buSzTx/>
+              <a:buFontTx/>
+              <a:buNone/>
+              <a:tabLst/>
+              <a:defRPr/>
+            </a:pPr>
+            <a:r>
+              <a:rPr kumimoji="0" lang="en-US" altLang="en-US" sz="1050" b="0" i="0" u="none" strike="noStrike" kern="1200" cap="none" spc="0" normalizeH="0" baseline="0" noProof="0" dirty="0">
+                <a:ln>
+                  <a:noFill/>
+                </a:ln>
+                <a:solidFill>
+                  <a:prstClr val="black"/>
+                </a:solidFill>
+                <a:effectLst/>
+                <a:uLnTx/>
+                <a:uFillTx/>
+                <a:latin typeface="Calibri" panose="020F0502020204030204" pitchFamily="34" charset="0"/>
+                <a:ea typeface="Yu Mincho" panose="02020400000000000000" pitchFamily="18" charset="-128"/>
+                <a:cs typeface="Arial" panose="020B0604020202020204" pitchFamily="34" charset="0"/>
+              </a:rPr>
+              <a:t>Yann Debray</a:t>
+            </a:r>
+            <a:endParaRPr kumimoji="0" lang="en-US" altLang="en-US" sz="700" b="0" i="0" u="none" strike="noStrike" kern="1200" cap="none" spc="0" normalizeH="0" baseline="0" noProof="0" dirty="0">
+              <a:ln>
+                <a:noFill/>
+              </a:ln>
+              <a:solidFill>
+                <a:prstClr val="black"/>
+              </a:solidFill>
+              <a:effectLst/>
+              <a:uLnTx/>
+              <a:uFillTx/>
+              <a:latin typeface="Aptos" panose="02110004020202020204"/>
+              <a:ea typeface="+mn-ea"/>
+              <a:cs typeface="+mn-cs"/>
+            </a:endParaRPr>
+          </a:p>
+        </p:txBody>
+      </p:sp>
     </p:spTree>
     <p:extLst>
       <p:ext uri="{BB962C8B-B14F-4D97-AF65-F5344CB8AC3E}">

--- a/cover/cover-11x18cm.pptx
+++ b/cover/cover-11x18cm.pptx
@@ -243,7 +243,7 @@
           <a:p>
             <a:fld id="{BC0168DA-BD25-412D-B32A-EDD36FEC6119}" type="datetimeFigureOut">
               <a:rPr lang="en-US" smtClean="0"/>
-              <a:t>4/3/2026</a:t>
+              <a:t>4/6/2026</a:t>
             </a:fld>
             <a:endParaRPr lang="en-US"/>
           </a:p>
@@ -413,7 +413,7 @@
           <a:p>
             <a:fld id="{BC0168DA-BD25-412D-B32A-EDD36FEC6119}" type="datetimeFigureOut">
               <a:rPr lang="en-US" smtClean="0"/>
-              <a:t>4/3/2026</a:t>
+              <a:t>4/6/2026</a:t>
             </a:fld>
             <a:endParaRPr lang="en-US"/>
           </a:p>
@@ -593,7 +593,7 @@
           <a:p>
             <a:fld id="{BC0168DA-BD25-412D-B32A-EDD36FEC6119}" type="datetimeFigureOut">
               <a:rPr lang="en-US" smtClean="0"/>
-              <a:t>4/3/2026</a:t>
+              <a:t>4/6/2026</a:t>
             </a:fld>
             <a:endParaRPr lang="en-US"/>
           </a:p>
@@ -763,7 +763,7 @@
           <a:p>
             <a:fld id="{BC0168DA-BD25-412D-B32A-EDD36FEC6119}" type="datetimeFigureOut">
               <a:rPr lang="en-US" smtClean="0"/>
-              <a:t>4/3/2026</a:t>
+              <a:t>4/6/2026</a:t>
             </a:fld>
             <a:endParaRPr lang="en-US"/>
           </a:p>
@@ -1009,7 +1009,7 @@
           <a:p>
             <a:fld id="{BC0168DA-BD25-412D-B32A-EDD36FEC6119}" type="datetimeFigureOut">
               <a:rPr lang="en-US" smtClean="0"/>
-              <a:t>4/3/2026</a:t>
+              <a:t>4/6/2026</a:t>
             </a:fld>
             <a:endParaRPr lang="en-US"/>
           </a:p>
@@ -1241,7 +1241,7 @@
           <a:p>
             <a:fld id="{BC0168DA-BD25-412D-B32A-EDD36FEC6119}" type="datetimeFigureOut">
               <a:rPr lang="en-US" smtClean="0"/>
-              <a:t>4/3/2026</a:t>
+              <a:t>4/6/2026</a:t>
             </a:fld>
             <a:endParaRPr lang="en-US"/>
           </a:p>
@@ -1608,7 +1608,7 @@
           <a:p>
             <a:fld id="{BC0168DA-BD25-412D-B32A-EDD36FEC6119}" type="datetimeFigureOut">
               <a:rPr lang="en-US" smtClean="0"/>
-              <a:t>4/3/2026</a:t>
+              <a:t>4/6/2026</a:t>
             </a:fld>
             <a:endParaRPr lang="en-US"/>
           </a:p>
@@ -1726,7 +1726,7 @@
           <a:p>
             <a:fld id="{BC0168DA-BD25-412D-B32A-EDD36FEC6119}" type="datetimeFigureOut">
               <a:rPr lang="en-US" smtClean="0"/>
-              <a:t>4/3/2026</a:t>
+              <a:t>4/6/2026</a:t>
             </a:fld>
             <a:endParaRPr lang="en-US"/>
           </a:p>
@@ -1821,7 +1821,7 @@
           <a:p>
             <a:fld id="{BC0168DA-BD25-412D-B32A-EDD36FEC6119}" type="datetimeFigureOut">
               <a:rPr lang="en-US" smtClean="0"/>
-              <a:t>4/3/2026</a:t>
+              <a:t>4/6/2026</a:t>
             </a:fld>
             <a:endParaRPr lang="en-US"/>
           </a:p>
@@ -2098,7 +2098,7 @@
           <a:p>
             <a:fld id="{BC0168DA-BD25-412D-B32A-EDD36FEC6119}" type="datetimeFigureOut">
               <a:rPr lang="en-US" smtClean="0"/>
-              <a:t>4/3/2026</a:t>
+              <a:t>4/6/2026</a:t>
             </a:fld>
             <a:endParaRPr lang="en-US"/>
           </a:p>
@@ -2355,7 +2355,7 @@
           <a:p>
             <a:fld id="{BC0168DA-BD25-412D-B32A-EDD36FEC6119}" type="datetimeFigureOut">
               <a:rPr lang="en-US" smtClean="0"/>
-              <a:t>4/3/2026</a:t>
+              <a:t>4/6/2026</a:t>
             </a:fld>
             <a:endParaRPr lang="en-US"/>
           </a:p>
@@ -2568,7 +2568,7 @@
           <a:p>
             <a:fld id="{BC0168DA-BD25-412D-B32A-EDD36FEC6119}" type="datetimeFigureOut">
               <a:rPr lang="en-US" smtClean="0"/>
-              <a:t>4/3/2026</a:t>
+              <a:t>4/6/2026</a:t>
             </a:fld>
             <a:endParaRPr lang="en-US"/>
           </a:p>
@@ -2989,7 +2989,7 @@
         </p:nvSpPr>
         <p:spPr bwMode="auto">
           <a:xfrm>
-            <a:off x="351947" y="626374"/>
+            <a:off x="290987" y="626374"/>
             <a:ext cx="3483928" cy="523220"/>
           </a:xfrm>
           <a:prstGeom prst="rect">
@@ -3065,12 +3065,91 @@
           </a:p>
         </p:txBody>
       </p:sp>
+      <p:sp>
+        <p:nvSpPr>
+          <p:cNvPr id="7" name="TextBox 6">
+            <a:extLst>
+              <a:ext uri="{FF2B5EF4-FFF2-40B4-BE49-F238E27FC236}">
+                <a16:creationId xmlns:a16="http://schemas.microsoft.com/office/drawing/2014/main" id="{278EDA5F-0691-6A7E-3DC3-21036B33B9BE}"/>
+              </a:ext>
+            </a:extLst>
+          </p:cNvPr>
+          <p:cNvSpPr txBox="1"/>
+          <p:nvPr/>
+        </p:nvSpPr>
+        <p:spPr>
+          <a:xfrm>
+            <a:off x="2270760" y="5973064"/>
+            <a:ext cx="1450815" cy="253916"/>
+          </a:xfrm>
+          <a:prstGeom prst="rect">
+            <a:avLst/>
+          </a:prstGeom>
+          <a:noFill/>
+        </p:spPr>
+        <p:txBody>
+          <a:bodyPr wrap="square">
+            <a:spAutoFit/>
+          </a:bodyPr>
+          <a:lstStyle/>
+          <a:p>
+            <a:pPr marL="0" marR="0" lvl="0" indent="0" algn="r" defTabSz="914400" rtl="0" eaLnBrk="0" fontAlgn="base" latinLnBrk="0" hangingPunct="0">
+              <a:lnSpc>
+                <a:spcPct val="100000"/>
+              </a:lnSpc>
+              <a:spcBef>
+                <a:spcPct val="0"/>
+              </a:spcBef>
+              <a:spcAft>
+                <a:spcPct val="0"/>
+              </a:spcAft>
+              <a:buClrTx/>
+              <a:buSzTx/>
+              <a:buFontTx/>
+              <a:buNone/>
+              <a:tabLst/>
+              <a:defRPr/>
+            </a:pPr>
+            <a:r>
+              <a:rPr kumimoji="0" lang="en-US" altLang="en-US" sz="1050" b="0" i="0" u="none" strike="noStrike" kern="1200" cap="none" spc="0" normalizeH="0" baseline="0" noProof="0" dirty="0">
+                <a:ln>
+                  <a:noFill/>
+                </a:ln>
+                <a:solidFill>
+                  <a:prstClr val="black"/>
+                </a:solidFill>
+                <a:effectLst/>
+                <a:uLnTx/>
+                <a:uFillTx/>
+                <a:latin typeface="Calibri" panose="020F0502020204030204" pitchFamily="34" charset="0"/>
+                <a:ea typeface="Yu Mincho" panose="02020400000000000000" pitchFamily="18" charset="-128"/>
+                <a:cs typeface="Arial" panose="020B0604020202020204" pitchFamily="34" charset="0"/>
+              </a:rPr>
+              <a:t>Yann Debray</a:t>
+            </a:r>
+            <a:endParaRPr kumimoji="0" lang="en-US" altLang="en-US" sz="700" b="0" i="0" u="none" strike="noStrike" kern="1200" cap="none" spc="0" normalizeH="0" baseline="0" noProof="0" dirty="0">
+              <a:ln>
+                <a:noFill/>
+              </a:ln>
+              <a:solidFill>
+                <a:prstClr val="black"/>
+              </a:solidFill>
+              <a:effectLst/>
+              <a:uLnTx/>
+              <a:uFillTx/>
+              <a:latin typeface="Aptos" panose="02110004020202020204"/>
+              <a:ea typeface="+mn-ea"/>
+              <a:cs typeface="+mn-cs"/>
+            </a:endParaRPr>
+          </a:p>
+        </p:txBody>
+      </p:sp>
       <p:pic>
         <p:nvPicPr>
-          <p:cNvPr id="5" name="Picture 4">
+          <p:cNvPr id="9" name="Picture 8">
             <a:extLst>
               <a:ext uri="{FF2B5EF4-FFF2-40B4-BE49-F238E27FC236}">
-                <a16:creationId xmlns:a16="http://schemas.microsoft.com/office/drawing/2014/main" id="{831A4D4E-B2CE-27E7-BD4D-1C91A586212D}"/>
+                <a16:creationId xmlns:a16="http://schemas.microsoft.com/office/drawing/2014/main" id="{A804D6B7-4851-C4EC-6836-5C8712C67664}"/>
               </a:ext>
             </a:extLst>
           </p:cNvPr>
@@ -3093,7 +3172,7 @@
         </p:blipFill>
         <p:spPr>
           <a:xfrm>
-            <a:off x="526342" y="2787394"/>
+            <a:off x="412043" y="2837927"/>
             <a:ext cx="3135137" cy="3135137"/>
           </a:xfrm>
           <a:prstGeom prst="rect">
@@ -3101,85 +3180,6 @@
           </a:prstGeom>
         </p:spPr>
       </p:pic>
-      <p:sp>
-        <p:nvSpPr>
-          <p:cNvPr id="7" name="TextBox 6">
-            <a:extLst>
-              <a:ext uri="{FF2B5EF4-FFF2-40B4-BE49-F238E27FC236}">
-                <a16:creationId xmlns:a16="http://schemas.microsoft.com/office/drawing/2014/main" id="{278EDA5F-0691-6A7E-3DC3-21036B33B9BE}"/>
-              </a:ext>
-            </a:extLst>
-          </p:cNvPr>
-          <p:cNvSpPr txBox="1"/>
-          <p:nvPr/>
-        </p:nvSpPr>
-        <p:spPr>
-          <a:xfrm>
-            <a:off x="2385060" y="6014762"/>
-            <a:ext cx="1450815" cy="253916"/>
-          </a:xfrm>
-          <a:prstGeom prst="rect">
-            <a:avLst/>
-          </a:prstGeom>
-          <a:noFill/>
-        </p:spPr>
-        <p:txBody>
-          <a:bodyPr wrap="square">
-            <a:spAutoFit/>
-          </a:bodyPr>
-          <a:lstStyle/>
-          <a:p>
-            <a:pPr marL="0" marR="0" lvl="0" indent="0" algn="r" defTabSz="914400" rtl="0" eaLnBrk="0" fontAlgn="base" latinLnBrk="0" hangingPunct="0">
-              <a:lnSpc>
-                <a:spcPct val="100000"/>
-              </a:lnSpc>
-              <a:spcBef>
-                <a:spcPct val="0"/>
-              </a:spcBef>
-              <a:spcAft>
-                <a:spcPct val="0"/>
-              </a:spcAft>
-              <a:buClrTx/>
-              <a:buSzTx/>
-              <a:buFontTx/>
-              <a:buNone/>
-              <a:tabLst/>
-              <a:defRPr/>
-            </a:pPr>
-            <a:r>
-              <a:rPr kumimoji="0" lang="en-US" altLang="en-US" sz="1050" b="0" i="0" u="none" strike="noStrike" kern="1200" cap="none" spc="0" normalizeH="0" baseline="0" noProof="0" dirty="0">
-                <a:ln>
-                  <a:noFill/>
-                </a:ln>
-                <a:solidFill>
-                  <a:prstClr val="black"/>
-                </a:solidFill>
-                <a:effectLst/>
-                <a:uLnTx/>
-                <a:uFillTx/>
-                <a:latin typeface="Calibri" panose="020F0502020204030204" pitchFamily="34" charset="0"/>
-                <a:ea typeface="Yu Mincho" panose="02020400000000000000" pitchFamily="18" charset="-128"/>
-                <a:cs typeface="Arial" panose="020B0604020202020204" pitchFamily="34" charset="0"/>
-              </a:rPr>
-              <a:t>Yann Debray</a:t>
-            </a:r>
-            <a:endParaRPr kumimoji="0" lang="en-US" altLang="en-US" sz="700" b="0" i="0" u="none" strike="noStrike" kern="1200" cap="none" spc="0" normalizeH="0" baseline="0" noProof="0" dirty="0">
-              <a:ln>
-                <a:noFill/>
-              </a:ln>
-              <a:solidFill>
-                <a:prstClr val="black"/>
-              </a:solidFill>
-              <a:effectLst/>
-              <a:uLnTx/>
-              <a:uFillTx/>
-              <a:latin typeface="Aptos" panose="02110004020202020204"/>
-              <a:ea typeface="+mn-ea"/>
-              <a:cs typeface="+mn-cs"/>
-            </a:endParaRPr>
-          </a:p>
-        </p:txBody>
-      </p:sp>
     </p:spTree>
     <p:extLst>
       <p:ext uri="{BB962C8B-B14F-4D97-AF65-F5344CB8AC3E}">
